--- a/dataset/guides_final/SYS/manual/IT-SYS-001-M_그룹웨어·ERP 이용 오류 처리 매뉴얼.pptx
+++ b/dataset/guides_final/SYS/manual/IT-SYS-001-M_그룹웨어·ERP 이용 오류 처리 매뉴얼.pptx
@@ -25172,7 +25172,7 @@
                 <a:ea typeface="Malgun Gothic"/>
                 <a:cs typeface="Malgun Gothic"/>
               </a:rPr>
-              <a:t>티켓: 담당자 조치가 필요한 건. 담당팀에 배정하고 상태를 RDY → IP → FIN → CLS 으로 관리한다.</a:t>
+              <a:t>티켓: 담당자 조치가 필요한 건. 담당팀에 배정하고 상태를 RDY → WIP → FIN → CLS 으로 관리한다.</a:t>
             </a:r>
           </a:p>
         </p:txBody>

--- a/dataset/guides_final/SYS/manual/IT-SYS-001-M_그룹웨어·ERP 이용 오류 처리 매뉴얼.pptx
+++ b/dataset/guides_final/SYS/manual/IT-SYS-001-M_그룹웨어·ERP 이용 오류 처리 매뉴얼.pptx
@@ -3233,7 +3233,7 @@
                 <a:ea typeface="Malgun Gothic"/>
                 <a:cs typeface="Malgun Gothic"/>
               </a:rPr>
-              <a:t>한화시스템 ICT IT 담당자 매뉴얼 · 사내 시스템</a:t>
+              <a:t>가상 ICT 기업 IT 담당자 매뉴얼 · 사내 시스템</a:t>
             </a:r>
           </a:p>
         </p:txBody>
@@ -3512,7 +3512,7 @@
                 <a:ea typeface="Malgun Gothic"/>
                 <a:cs typeface="Malgun Gothic"/>
               </a:rPr>
-              <a:t>© HANWHA SYSTEMS ICT · IT-SYS-001-M · 사내 제한</a:t>
+              <a:t>© 가상 ICT 기업 · IT-SYS-001-M · 사내 제한</a:t>
             </a:r>
           </a:p>
         </p:txBody>
@@ -6128,7 +6128,7 @@
                 <a:ea typeface="Malgun Gothic"/>
                 <a:cs typeface="Malgun Gothic"/>
               </a:rPr>
-              <a:t>© HANWHA SYSTEMS ICT · IT-SYS-001-M · 사내 제한</a:t>
+              <a:t>© 가상 ICT 기업 · IT-SYS-001-M · 사내 제한</a:t>
             </a:r>
           </a:p>
         </p:txBody>
@@ -8744,7 +8744,7 @@
                 <a:ea typeface="Malgun Gothic"/>
                 <a:cs typeface="Malgun Gothic"/>
               </a:rPr>
-              <a:t>© HANWHA SYSTEMS ICT · IT-SYS-001-M · 사내 제한</a:t>
+              <a:t>© 가상 ICT 기업 · IT-SYS-001-M · 사내 제한</a:t>
             </a:r>
           </a:p>
         </p:txBody>
@@ -11290,7 +11290,7 @@
                 <a:ea typeface="Malgun Gothic"/>
                 <a:cs typeface="Malgun Gothic"/>
               </a:rPr>
-              <a:t>© HANWHA SYSTEMS ICT · IT-SYS-001-M · 사내 제한</a:t>
+              <a:t>© 가상 ICT 기업 · IT-SYS-001-M · 사내 제한</a:t>
             </a:r>
           </a:p>
         </p:txBody>
@@ -13906,7 +13906,7 @@
                 <a:ea typeface="Malgun Gothic"/>
                 <a:cs typeface="Malgun Gothic"/>
               </a:rPr>
-              <a:t>© HANWHA SYSTEMS ICT · IT-SYS-001-M · 사내 제한</a:t>
+              <a:t>© 가상 ICT 기업 · IT-SYS-001-M · 사내 제한</a:t>
             </a:r>
           </a:p>
         </p:txBody>
@@ -14154,7 +14154,7 @@
                 <a:ea typeface="Malgun Gothic"/>
                 <a:cs typeface="Malgun Gothic"/>
               </a:rPr>
-              <a:t>© HANWHA SYSTEMS ICT · IT-SYS-001-M · 사내 제한</a:t>
+              <a:t>© 가상 ICT 기업 · IT-SYS-001-M · 사내 제한</a:t>
             </a:r>
           </a:p>
         </p:txBody>
@@ -14813,7 +14813,7 @@
                 <a:ea typeface="Malgun Gothic"/>
                 <a:cs typeface="Malgun Gothic"/>
               </a:rPr>
-              <a:t>© HANWHA SYSTEMS ICT · IT-SYS-001-M · 사내 제한</a:t>
+              <a:t>© 가상 ICT 기업 · IT-SYS-001-M · 사내 제한</a:t>
             </a:r>
           </a:p>
         </p:txBody>
@@ -15061,7 +15061,7 @@
                 <a:ea typeface="Malgun Gothic"/>
                 <a:cs typeface="Malgun Gothic"/>
               </a:rPr>
-              <a:t>© HANWHA SYSTEMS ICT · IT-SYS-001-M · 사내 제한</a:t>
+              <a:t>© 가상 ICT 기업 · IT-SYS-001-M · 사내 제한</a:t>
             </a:r>
           </a:p>
         </p:txBody>
@@ -16089,7 +16089,7 @@
                 <a:ea typeface="Malgun Gothic"/>
                 <a:cs typeface="Malgun Gothic"/>
               </a:rPr>
-              <a:t>© HANWHA SYSTEMS ICT · IT-SYS-001-M · 사내 제한</a:t>
+              <a:t>© 가상 ICT 기업 · IT-SYS-001-M · 사내 제한</a:t>
             </a:r>
           </a:p>
         </p:txBody>
@@ -16337,7 +16337,7 @@
                 <a:ea typeface="Malgun Gothic"/>
                 <a:cs typeface="Malgun Gothic"/>
               </a:rPr>
-              <a:t>© HANWHA SYSTEMS ICT · IT-SYS-001-M · 사내 제한</a:t>
+              <a:t>© 가상 ICT 기업 · IT-SYS-001-M · 사내 제한</a:t>
             </a:r>
           </a:p>
         </p:txBody>
@@ -17029,7 +17029,7 @@
                 <a:ea typeface="Malgun Gothic"/>
                 <a:cs typeface="Malgun Gothic"/>
               </a:rPr>
-              <a:t>© HANWHA SYSTEMS ICT · IT-SYS-001-M · 사내 제한</a:t>
+              <a:t>© 가상 ICT 기업 · IT-SYS-001-M · 사내 제한</a:t>
             </a:r>
           </a:p>
         </p:txBody>
@@ -18672,7 +18672,7 @@
                 <a:ea typeface="Malgun Gothic"/>
                 <a:cs typeface="Malgun Gothic"/>
               </a:rPr>
-              <a:t>© HANWHA SYSTEMS ICT · IT-SYS-001-M · 사내 제한</a:t>
+              <a:t>© 가상 ICT 기업 · IT-SYS-001-M · 사내 제한</a:t>
             </a:r>
           </a:p>
         </p:txBody>
@@ -19649,7 +19649,7 @@
                 <a:ea typeface="Malgun Gothic"/>
                 <a:cs typeface="Malgun Gothic"/>
               </a:rPr>
-              <a:t>© HANWHA SYSTEMS ICT · IT-SYS-001-M · 사내 제한</a:t>
+              <a:t>© 가상 ICT 기업 · IT-SYS-001-M · 사내 제한</a:t>
             </a:r>
           </a:p>
         </p:txBody>
@@ -20795,7 +20795,7 @@
                 <a:ea typeface="Malgun Gothic"/>
                 <a:cs typeface="Malgun Gothic"/>
               </a:rPr>
-              <a:t>© HANWHA SYSTEMS ICT · IT-SYS-001-M · 사내 제한</a:t>
+              <a:t>© 가상 ICT 기업 · IT-SYS-001-M · 사내 제한</a:t>
             </a:r>
           </a:p>
         </p:txBody>
@@ -21043,7 +21043,7 @@
                 <a:ea typeface="Malgun Gothic"/>
                 <a:cs typeface="Malgun Gothic"/>
               </a:rPr>
-              <a:t>© HANWHA SYSTEMS ICT · IT-SYS-001-M · 사내 제한</a:t>
+              <a:t>© 가상 ICT 기업 · IT-SYS-001-M · 사내 제한</a:t>
             </a:r>
           </a:p>
         </p:txBody>
@@ -22053,7 +22053,7 @@
                 <a:ea typeface="Malgun Gothic"/>
                 <a:cs typeface="Malgun Gothic"/>
               </a:rPr>
-              <a:t>© HANWHA SYSTEMS ICT · IT-SYS-001-M · 사내 제한</a:t>
+              <a:t>© 가상 ICT 기업 · IT-SYS-001-M · 사내 제한</a:t>
             </a:r>
           </a:p>
         </p:txBody>
@@ -22301,7 +22301,7 @@
                 <a:ea typeface="Malgun Gothic"/>
                 <a:cs typeface="Malgun Gothic"/>
               </a:rPr>
-              <a:t>© HANWHA SYSTEMS ICT · IT-SYS-001-M · 사내 제한</a:t>
+              <a:t>© 가상 ICT 기업 · IT-SYS-001-M · 사내 제한</a:t>
             </a:r>
           </a:p>
         </p:txBody>
@@ -25548,7 +25548,7 @@
                 <a:ea typeface="Malgun Gothic"/>
                 <a:cs typeface="Malgun Gothic"/>
               </a:rPr>
-              <a:t>© HANWHA SYSTEMS ICT · IT-SYS-001-M · 사내 제한</a:t>
+              <a:t>© 가상 ICT 기업 · IT-SYS-001-M · 사내 제한</a:t>
             </a:r>
           </a:p>
         </p:txBody>
@@ -25796,7 +25796,7 @@
                 <a:ea typeface="Malgun Gothic"/>
                 <a:cs typeface="Malgun Gothic"/>
               </a:rPr>
-              <a:t>© HANWHA SYSTEMS ICT · IT-SYS-001-M · 사내 제한</a:t>
+              <a:t>© 가상 ICT 기업 · IT-SYS-001-M · 사내 제한</a:t>
             </a:r>
           </a:p>
         </p:txBody>
@@ -28506,7 +28506,7 @@
                 <a:ea typeface="Malgun Gothic"/>
                 <a:cs typeface="Malgun Gothic"/>
               </a:rPr>
-              <a:t>© HANWHA SYSTEMS ICT · IT-SYS-001-M · 사내 제한</a:t>
+              <a:t>© 가상 ICT 기업 · IT-SYS-001-M · 사내 제한</a:t>
             </a:r>
           </a:p>
         </p:txBody>
